--- a/EduentFoundation_IBMUniversityEngagement.pptx
+++ b/EduentFoundation_IBMUniversityEngagement.pptx
@@ -259,7 +259,7 @@
       <p15:sldGuideLst xmlns:p15="http://schemas.microsoft.com/office/powerpoint/2012/main"/>
     </p:ext>
     <p:ext uri="GoogleSlidesCustomDataVersion2">
-      <go:slidesCustomData xmlns="" xmlns:mc="http://schemas.openxmlformats.org/markup-compatibility/2006" xmlns:mv="urn:schemas-microsoft-com:mac:vml" xmlns:c="http://schemas.openxmlformats.org/drawingml/2006/chart" xmlns:dgm="http://schemas.openxmlformats.org/drawingml/2006/diagram" xmlns:o="urn:schemas-microsoft-com:office:office" xmlns:v="urn:schemas-microsoft-com:vml" xmlns:pvml="urn:schemas-microsoft-com:office:powerpoint" xmlns:com="http://schemas.openxmlformats.org/drawingml/2006/compatibility" xmlns:p14="http://schemas.microsoft.com/office/powerpoint/2010/main" xmlns:p15="http://schemas.microsoft.com/office/powerpoint/2012/main" xmlns:ahyp="http://schemas.microsoft.com/office/drawing/2018/hyperlinkcolor" xmlns:go="http://customooxmlschemas.google.com/" r:id="rId27" roundtripDataSignature="AMtx7mjt3491jQ7aCoyIz2WXeHKroE7tpQ=="/>
+      <go:slidesCustomData xmlns:go="http://customooxmlschemas.google.com/" xmlns:ahyp="http://schemas.microsoft.com/office/drawing/2018/hyperlinkcolor" xmlns:p15="http://schemas.microsoft.com/office/powerpoint/2012/main" xmlns:p14="http://schemas.microsoft.com/office/powerpoint/2010/main" xmlns:com="http://schemas.openxmlformats.org/drawingml/2006/compatibility" xmlns:pvml="urn:schemas-microsoft-com:office:powerpoint" xmlns:v="urn:schemas-microsoft-com:vml" xmlns:o="urn:schemas-microsoft-com:office:office" xmlns:dgm="http://schemas.openxmlformats.org/drawingml/2006/diagram" xmlns:c="http://schemas.openxmlformats.org/drawingml/2006/chart" xmlns:mv="urn:schemas-microsoft-com:mac:vml" xmlns:mc="http://schemas.openxmlformats.org/markup-compatibility/2006" xmlns="" r:id="rId27" roundtripDataSignature="AMtx7mjt3491jQ7aCoyIz2WXeHKroE7tpQ=="/>
     </p:ext>
   </p:extLst>
 </p:presentation>
@@ -12717,32 +12717,22 @@
               </a:rPr>
               <a:t> repository:</a:t>
             </a:r>
-            <a:br>
-              <a:rPr lang="en-US" sz="1600" dirty="0">
-                <a:latin typeface="Arial" panose="020B0604020202020204" pitchFamily="34" charset="0"/>
-                <a:ea typeface="Times New Roman"/>
-                <a:cs typeface="Arial" panose="020B0604020202020204" pitchFamily="34" charset="0"/>
-                <a:sym typeface="Times New Roman"/>
-              </a:rPr>
-            </a:br>
+          </a:p>
+          <a:p>
+            <a:pPr lvl="0">
+              <a:lnSpc>
+                <a:spcPct val="162162"/>
+              </a:lnSpc>
+              <a:buClr>
+                <a:srgbClr val="2B3541"/>
+              </a:buClr>
+              <a:buSzPts val="1850"/>
+            </a:pPr>
             <a:r>
-              <a:rPr lang="en-US" sz="1600" dirty="0">
-                <a:latin typeface="Arial" panose="020B0604020202020204" pitchFamily="34" charset="0"/>
-                <a:ea typeface="Times New Roman"/>
-                <a:cs typeface="Arial" panose="020B0604020202020204" pitchFamily="34" charset="0"/>
-                <a:sym typeface="Times New Roman"/>
-              </a:rPr>
-              <a:t> </a:t>
-            </a:r>
-            <a:r>
-              <a:rPr lang="en-US" sz="1600" dirty="0">
-                <a:latin typeface="Arial" panose="020B0604020202020204" pitchFamily="34" charset="0"/>
-                <a:ea typeface="Times New Roman"/>
-                <a:cs typeface="Arial" panose="020B0604020202020204" pitchFamily="34" charset="0"/>
-                <a:sym typeface="Times New Roman"/>
+              <a:rPr lang="en-IN" sz="1600" dirty="0">
                 <a:hlinkClick r:id="rId3"/>
               </a:rPr>
-              <a:t>https://github.com/Siddhartha-raj-kotha/Indian-Cuisine-Recipe-Assistant</a:t>
+              <a:t>https://github.com/Shiva-Krishna-Varikoti/Indian-cuisine-food-recipe-assistant</a:t>
             </a:r>
             <a:br>
               <a:rPr lang="en-US" sz="1600" dirty="0">
@@ -13721,7 +13711,7 @@
           <p:nvPr>
             <p:extLst>
               <p:ext uri="{D42A27DB-BD31-4B8C-83A1-F6EECF244321}">
-                <p14:modId xmlns:p14="http://schemas.microsoft.com/office/powerpoint/2010/main" val="779081648"/>
+                <p14:modId xmlns:p14="http://schemas.microsoft.com/office/powerpoint/2010/main" val="67999253"/>
               </p:ext>
             </p:extLst>
           </p:nvPr>
@@ -13752,14 +13742,14 @@
                     </a:ext>
                   </a:extLst>
                 </a:gridCol>
-                <a:gridCol w="2674350">
+                <a:gridCol w="2821347">
                   <a:extLst>
                     <a:ext uri="{9D8B030D-6E8A-4147-A177-3AD203B41FA5}">
                       <a16:colId xmlns:a16="http://schemas.microsoft.com/office/drawing/2014/main" val="20003"/>
                     </a:ext>
                   </a:extLst>
                 </a:gridCol>
-                <a:gridCol w="2212398">
+                <a:gridCol w="2065401">
                   <a:extLst>
                     <a:ext uri="{9D8B030D-6E8A-4147-A177-3AD203B41FA5}">
                       <a16:colId xmlns:a16="http://schemas.microsoft.com/office/drawing/2014/main" val="20004"/>
@@ -14127,8 +14117,12 @@
                         <a:buNone/>
                       </a:pPr>
                       <a:r>
+                        <a:rPr lang="en-US" dirty="0" err="1"/>
+                        <a:t>Varikoti</a:t>
+                      </a:r>
+                      <a:r>
                         <a:rPr lang="en-US" dirty="0"/>
-                        <a:t>KOTHA SIDDHARTHA RAJ</a:t>
+                        <a:t> Shiva Krishna</a:t>
                       </a:r>
                       <a:endParaRPr dirty="0"/>
                     </a:p>
@@ -14250,7 +14244,7 @@
                       </a:pPr>
                       <a:r>
                         <a:rPr lang="en-US" dirty="0"/>
-                        <a:t>siddhartharajkotha@gmail.com</a:t>
+                        <a:t>varikotishivakrishna@gmail.com</a:t>
                       </a:r>
                       <a:endParaRPr dirty="0"/>
                     </a:p>
@@ -14312,8 +14306,8 @@
                         <a:buNone/>
                       </a:pPr>
                       <a:r>
-                        <a:rPr lang="en-US" dirty="0"/>
-                        <a:t>7799236362</a:t>
+                        <a:rPr lang="en-IN" dirty="0"/>
+                        <a:t>9059802134</a:t>
                       </a:r>
                       <a:endParaRPr dirty="0"/>
                     </a:p>
@@ -14473,15 +14467,28 @@
           <p:nvPr/>
         </p:nvPicPr>
         <p:blipFill>
-          <a:blip r:embed="rId3"/>
+          <a:blip r:embed="rId3">
+            <a:extLst>
+              <a:ext uri="{BEBA8EAE-BF5A-486C-A8C5-ECC9F3942E4B}">
+                <a14:imgProps xmlns:a14="http://schemas.microsoft.com/office/drawing/2010/main">
+                  <a14:imgLayer r:embed="rId4">
+                    <a14:imgEffect>
+                      <a14:brightnessContrast bright="5000" contrast="17000"/>
+                    </a14:imgEffect>
+                  </a14:imgLayer>
+                </a14:imgProps>
+              </a:ext>
+            </a:extLst>
+          </a:blip>
+          <a:srcRect l="1" t="2778" r="1" b="-1"/>
           <a:stretch>
             <a:fillRect/>
           </a:stretch>
         </p:blipFill>
         <p:spPr>
           <a:xfrm>
-            <a:off x="4137605" y="3812970"/>
-            <a:ext cx="1128078" cy="1224799"/>
+            <a:off x="4212000" y="3816000"/>
+            <a:ext cx="1188000" cy="1260000"/>
           </a:xfrm>
           <a:prstGeom prst="rect">
             <a:avLst/>
